--- a/CropBid-Pitch-Deck.pptx
+++ b/CropBid-Pitch-Deck.pptx
@@ -3444,7 +3444,7 @@
                 </a:solidFill>
                 <a:latin typeface="Avenir Next"/>
               </a:rPr>
-              <a:t>India 2047 Ventures</a:t>
+              <a:t>India 2047 Ventures  ·  Founder Startup House</a:t>
             </a:r>
           </a:p>
         </p:txBody>
@@ -3824,7 +3824,7 @@
                 </a:solidFill>
                 <a:latin typeface="Avenir Next"/>
               </a:rPr>
-              <a:t>India 2047 Ventures</a:t>
+              <a:t>India 2047 Ventures and Founder Startup House</a:t>
             </a:r>
           </a:p>
         </p:txBody>
@@ -5695,7 +5695,7 @@
                 </a:solidFill>
                 <a:latin typeface="Avenir Next"/>
               </a:rPr>
-              <a:t>India 2047 Ventures</a:t>
+              <a:t>India 2047 Ventures  ·  Founder Startup House</a:t>
             </a:r>
           </a:p>
         </p:txBody>
@@ -6378,8 +6378,8 @@
         </p:nvSpPr>
         <p:spPr>
           <a:xfrm>
-            <a:off x="800100" y="1920240"/>
-            <a:ext cx="5193792" cy="1572768"/>
+            <a:off x="804672" y="1920240"/>
+            <a:ext cx="3376879" cy="2011680"/>
           </a:xfrm>
           <a:prstGeom prst="roundRect">
             <a:avLst>
@@ -6418,7 +6418,7 @@
               </a:spcAft>
             </a:pPr>
             <a:r>
-              <a:rPr sz="1500" b="1" i="0" u="none">
+              <a:rPr sz="1350" b="1" i="0" u="none">
                 <a:solidFill>
                   <a:srgbClr val="181B10"/>
                 </a:solidFill>
@@ -6434,7 +6434,7 @@
               </a:lnSpc>
             </a:pPr>
             <a:r>
-              <a:rPr sz="1200" b="0" i="0" u="none">
+              <a:rPr sz="1050" b="0" i="0" u="none">
                 <a:solidFill>
                   <a:srgbClr val="4A4D3E"/>
                 </a:solidFill>
@@ -6453,8 +6453,8 @@
         </p:nvSpPr>
         <p:spPr>
           <a:xfrm>
-            <a:off x="6195060" y="1920240"/>
-            <a:ext cx="5193792" cy="1572768"/>
+            <a:off x="4410151" y="1920240"/>
+            <a:ext cx="3376879" cy="2011680"/>
           </a:xfrm>
           <a:prstGeom prst="roundRect">
             <a:avLst>
@@ -6493,7 +6493,7 @@
               </a:spcAft>
             </a:pPr>
             <a:r>
-              <a:rPr sz="1500" b="1" i="0" u="none">
+              <a:rPr sz="1350" b="1" i="0" u="none">
                 <a:solidFill>
                   <a:srgbClr val="181B10"/>
                 </a:solidFill>
@@ -6509,7 +6509,7 @@
               </a:lnSpc>
             </a:pPr>
             <a:r>
-              <a:rPr sz="1200" b="0" i="0" u="none">
+              <a:rPr sz="1050" b="0" i="0" u="none">
                 <a:solidFill>
                   <a:srgbClr val="4A4D3E"/>
                 </a:solidFill>
@@ -6528,8 +6528,8 @@
         </p:nvSpPr>
         <p:spPr>
           <a:xfrm>
-            <a:off x="800100" y="3694176"/>
-            <a:ext cx="5193792" cy="1572768"/>
+            <a:off x="8016544" y="1920240"/>
+            <a:ext cx="3376879" cy="2011680"/>
           </a:xfrm>
           <a:prstGeom prst="roundRect">
             <a:avLst>
@@ -6568,13 +6568,13 @@
               </a:spcAft>
             </a:pPr>
             <a:r>
-              <a:rPr sz="1500" b="1" i="0" u="none">
+              <a:rPr sz="1350" b="1" i="0" u="none">
                 <a:solidFill>
                   <a:srgbClr val="181B10"/>
                 </a:solidFill>
                 <a:latin typeface="Avenir Next"/>
               </a:rPr>
-              <a:t>Escrow payments</a:t>
+              <a:t>Escrow, and contact held until it funds</a:t>
             </a:r>
           </a:p>
           <a:p>
@@ -6584,13 +6584,13 @@
               </a:lnSpc>
             </a:pPr>
             <a:r>
-              <a:rPr sz="1200" b="0" i="0" u="none">
+              <a:rPr sz="1050" b="0" i="0" u="none">
                 <a:solidFill>
                   <a:srgbClr val="4A4D3E"/>
                 </a:solidFill>
                 <a:latin typeface="Avenir Next"/>
               </a:rPr>
-              <a:t>Razorpay holds the money; it releases only on confirmed delivery. Sellers never ship and chase payments again.</a:t>
+              <a:t>Razorpay holds the money and releases it on confirmed delivery. The buyer's number reaches the farmer only once the escrow is funded, so nobody takes the deal off-platform.</a:t>
             </a:r>
           </a:p>
         </p:txBody>
@@ -6603,8 +6603,8 @@
         </p:nvSpPr>
         <p:spPr>
           <a:xfrm>
-            <a:off x="6195060" y="3694176"/>
-            <a:ext cx="5193792" cy="1572768"/>
+            <a:off x="804672" y="4133087"/>
+            <a:ext cx="3376879" cy="2011680"/>
           </a:xfrm>
           <a:prstGeom prst="roundRect">
             <a:avLst>
@@ -6643,13 +6643,13 @@
               </a:spcAft>
             </a:pPr>
             <a:r>
-              <a:rPr sz="1500" b="1" i="0" u="none">
+              <a:rPr sz="1350" b="1" i="0" u="none">
                 <a:solidFill>
                   <a:srgbClr val="181B10"/>
                 </a:solidFill>
                 <a:latin typeface="Avenir Next"/>
               </a:rPr>
-              <a:t>Direct retail channel</a:t>
+              <a:t>A farm-to-home shop, with a cart</a:t>
             </a:r>
           </a:p>
           <a:p>
@@ -6659,13 +6659,13 @@
               </a:lnSpc>
             </a:pPr>
             <a:r>
-              <a:rPr sz="1200" b="0" i="0" u="none">
+              <a:rPr sz="1050" b="0" i="0" u="none">
                 <a:solidFill>
                   <a:srgbClr val="4A4D3E"/>
                 </a:solidFill>
                 <a:latin typeface="Avenir Next"/>
               </a:rPr>
-              <a:t>Farmers flip a listing to retail at a fixed price; consumers buy any quantity instantly — farm to home, no bidding.</a:t>
+              <a:t>Households fill one basket across several growers and pay one bill. The shelf only shows lots that can actually reach their city.</a:t>
             </a:r>
           </a:p>
         </p:txBody>
@@ -6700,7 +6700,7 @@
                 </a:solidFill>
                 <a:latin typeface="Avenir Next"/>
               </a:rPr>
-              <a:t>Live in production at cropbid.in — web storefront + native apps in Hindi, Marathi &amp; English.</a:t>
+              <a:t>Live in production at cropbid.in — web storefront + native apps, listings dictated by voice in Hindi, Marathi &amp; English.</a:t>
             </a:r>
           </a:p>
         </p:txBody>
@@ -6736,6 +6736,156 @@
                 <a:latin typeface="Avenir Next"/>
               </a:rPr>
               <a:t>CropBid · cropbid.in — 3</a:t>
+            </a:r>
+          </a:p>
+        </p:txBody>
+      </p:sp>
+      <p:sp>
+        <p:nvSpPr>
+          <p:cNvPr id="7" name="Rounded Rectangle 7"/>
+          <p:cNvSpPr/>
+          <p:nvPr/>
+        </p:nvSpPr>
+        <p:spPr>
+          <a:xfrm>
+            <a:off x="4410151" y="4133087"/>
+            <a:ext cx="3376879" cy="2011680"/>
+          </a:xfrm>
+          <a:prstGeom prst="roundRect">
+            <a:avLst>
+              <a:gd name="adj" fmla="val 9000"/>
+            </a:avLst>
+          </a:prstGeom>
+          <a:solidFill>
+            <a:srgbClr val="E9EFDC"/>
+          </a:solidFill>
+          <a:ln>
+            <a:noFill/>
+          </a:ln>
+          <a:effectLst/>
+        </p:spPr>
+        <p:style>
+          <a:lnRef idx="1">
+            <a:schemeClr val="accent1"/>
+          </a:lnRef>
+          <a:fillRef idx="3">
+            <a:schemeClr val="accent1"/>
+          </a:fillRef>
+          <a:effectRef idx="2">
+            <a:schemeClr val="accent1"/>
+          </a:effectRef>
+          <a:fontRef idx="minor">
+            <a:schemeClr val="lt1"/>
+          </a:fontRef>
+        </p:style>
+        <p:txBody>
+          <a:bodyPr rtlCol="0" anchor="t" wrap="square" lIns="237744" rIns="237744" tIns="182880" bIns="146304"/>
+          <a:lstStyle/>
+          <a:p>
+            <a:pPr algn="ctr">
+              <a:spcAft>
+                <a:spcPts val="500"/>
+              </a:spcAft>
+            </a:pPr>
+            <a:r>
+              <a:rPr sz="1350" b="1" i="0" u="none">
+                <a:solidFill>
+                  <a:srgbClr val="181B10"/>
+                </a:solidFill>
+                <a:latin typeface="Avenir Next"/>
+              </a:rPr>
+              <a:t>Buyers post demand, sellers answer</a:t>
+            </a:r>
+          </a:p>
+          <a:p>
+            <a:pPr algn="l">
+              <a:lnSpc>
+                <a:spcPct val="120000"/>
+              </a:lnSpc>
+            </a:pPr>
+            <a:r>
+              <a:rPr sz="1050" b="0" i="0" u="none">
+                <a:solidFill>
+                  <a:srgbClr val="4A4D3E"/>
+                </a:solidFill>
+                <a:latin typeface="Avenir Next"/>
+              </a:rPr>
+              <a:t>Restaurants, shops and processors publish what they need and at what price; farmers quote against it. The board runs the exchange in reverse.</a:t>
+            </a:r>
+          </a:p>
+        </p:txBody>
+      </p:sp>
+      <p:sp>
+        <p:nvSpPr>
+          <p:cNvPr id="7" name="Rounded Rectangle 8"/>
+          <p:cNvSpPr/>
+          <p:nvPr/>
+        </p:nvSpPr>
+        <p:spPr>
+          <a:xfrm>
+            <a:off x="8016544" y="4133087"/>
+            <a:ext cx="3376879" cy="2011680"/>
+          </a:xfrm>
+          <a:prstGeom prst="roundRect">
+            <a:avLst>
+              <a:gd name="adj" fmla="val 9000"/>
+            </a:avLst>
+          </a:prstGeom>
+          <a:solidFill>
+            <a:srgbClr val="E9EFDC"/>
+          </a:solidFill>
+          <a:ln>
+            <a:noFill/>
+          </a:ln>
+          <a:effectLst/>
+        </p:spPr>
+        <p:style>
+          <a:lnRef idx="1">
+            <a:schemeClr val="accent1"/>
+          </a:lnRef>
+          <a:fillRef idx="3">
+            <a:schemeClr val="accent1"/>
+          </a:fillRef>
+          <a:effectRef idx="2">
+            <a:schemeClr val="accent1"/>
+          </a:effectRef>
+          <a:fontRef idx="minor">
+            <a:schemeClr val="lt1"/>
+          </a:fontRef>
+        </p:style>
+        <p:txBody>
+          <a:bodyPr rtlCol="0" anchor="t" wrap="square" lIns="237744" rIns="237744" tIns="182880" bIns="146304"/>
+          <a:lstStyle/>
+          <a:p>
+            <a:pPr algn="ctr">
+              <a:spcAft>
+                <a:spcPts val="500"/>
+              </a:spcAft>
+            </a:pPr>
+            <a:r>
+              <a:rPr sz="1350" b="1" i="0" u="none">
+                <a:solidFill>
+                  <a:srgbClr val="181B10"/>
+                </a:solidFill>
+                <a:latin typeface="Avenir Next"/>
+              </a:rPr>
+              <a:t>Every seller and buyer reviewed</a:t>
+            </a:r>
+          </a:p>
+          <a:p>
+            <a:pPr algn="l">
+              <a:lnSpc>
+                <a:spcPct val="120000"/>
+              </a:lnSpc>
+            </a:pPr>
+            <a:r>
+              <a:rPr sz="1050" b="0" i="0" u="none">
+                <a:solidFill>
+                  <a:srgbClr val="4A4D3E"/>
+                </a:solidFill>
+                <a:latin typeface="Avenir Next"/>
+              </a:rPr>
+              <a:t>Farmers, local shops, wholesalers and business buyers apply and are approved by hand — supply on the shelf is vetted, not scraped.</a:t>
             </a:r>
           </a:p>
         </p:txBody>
@@ -9140,7 +9290,7 @@
                 </a:solidFill>
                 <a:latin typeface="Avenir Next"/>
               </a:rPr>
-              <a:t>4,600+ mandi prices on every listing, in the farmer's language — the information advantage middlemen rely on, gone.</a:t>
+              <a:t>4,600+ mandi prices on every listing, in the farmer's language — and a farmer who cannot type lists by speaking. The information advantage middlemen rely on, gone.</a:t>
             </a:r>
           </a:p>
         </p:txBody>
@@ -9322,7 +9472,7 @@
                 </a:solidFill>
                 <a:latin typeface="Avenir Next"/>
               </a:rPr>
-              <a:t>Whole chain on one screen</a:t>
+              <a:t>Whole chain on one screen — both ways</a:t>
             </a:r>
           </a:p>
           <a:p>
@@ -9338,7 +9488,7 @@
                 </a:solidFill>
                 <a:latin typeface="Avenir Next"/>
               </a:rPr>
-              <a:t>Farmer, trader, wholesaler, retailer and consumer on the same exchange — every hop is our fee event, not a competitor's.</a:t>
+              <a:t>Farmer, shop, wholesaler, restaurant and household on the same exchange, with sellers listing and buyers posting demand. Every hop is our fee event, not a competitor's.</a:t>
             </a:r>
           </a:p>
         </p:txBody>
@@ -9437,7 +9587,7 @@
                 </a:solidFill>
                 <a:latin typeface="Avenir Next"/>
               </a:rPr>
-              <a:t>Escrow + trust scores + AI-agent negotiation history — every completed deal makes the next one easier to win here.</a:t>
+              <a:t>Every partner is approved by hand; escrow, published quality limits and trust scores do the rest. Buyer contact stays sealed until the money is in — so the deal that follows is ours too.</a:t>
             </a:r>
           </a:p>
         </p:txBody>
@@ -10458,7 +10608,7 @@
                 </a:solidFill>
                 <a:latin typeface="Avenir Next"/>
               </a:rPr>
-              <a:t>Storefront, live mandi rates with market-wise detail, open bidding &amp; auctions, AI-agent negotiation, escrow with tracked deal flow, direct retail, Sarkari Yojana hub — web + native apps.</a:t>
+              <a:t>Storefront and city-local consumer shop with cart and one bill, live mandi rates, open bidding &amp; auctions, a buyer demand board, AI-agent negotiation, escrow with tracked deal flow, reviewed partner onboarding, voice listing, Sarkari Yojana hub — web + native apps.</a:t>
             </a:r>
           </a:p>
         </p:txBody>
